--- a/06/ppt/06-2_서비스_제작_계획서_시작하기_v1.pptx
+++ b/06/ppt/06-2_서비스_제작_계획서_시작하기_v1.pptx
@@ -798,7 +798,7 @@
               <a:rPr lang="en-US" dirty="0"/>
               <a:t>[33–42분] PRD로 목업을 만들고 Live Server로 본다
 마지막으로 PRD에 목업을 붙여 봅니다. 교과서 12쪽. 9분.
-첫 줄에 내 PRD 이름을 붙여 넣고 보내세요. PRD를 토대로 최소한의 목업을, 기초적인 디자인은 깔끔하게 넣어 달라고 합니다. 「파일로 저장해, 코드를 대화창에 보여 주지 마」를 빼면 AI가 파일을 만들지 않고 코드만 늘어놓을 수 있습니다. 실제로 시험해 보니 그랬습니다.
+교과서 12쪽 요청문을 복사해 보내세요. PRD를 토대로 최소한의 목업을, 기초적인 디자인은 깔끔하게 넣어 달라고 합니다. 「파일로 저장해, 코드를 대화창에 보여 주지 마」를 빼면 AI가 파일을 만들지 않고 코드만 늘어놓을 수 있습니다. 실제로 시험해 보니 그랬습니다.
 목업은 06 폴더 안에 mockup 폴더를 따로 만들어 그 안에 넣게 합니다. PRD와 목업 파일이 섞이지 않습니다. AI가 끝나면 mockup 폴더를 펼쳐 index.html을 오른쪽 클릭해서 Open with Live Server. (오른쪽 화면을 가리키며) 내가 쓴 4항이 이런 화면이 됩니다.
 화면을 끝까지 보고, PRD와 다른 곳이 있으면 목업이 아니라 PRD의 글부터 고치고 같은 요청을 다시 보냅니다. 목업은 제출물이 아닙니다. 내 글을 확인하는 도구입니다.
 [진행 메모]
@@ -1082,7 +1082,7 @@
               <a:t>[2–5분] PRD는 무엇을 만들지 적은 약속이다
 PRD는 Product Requirements Document, 우리말로 서비스 제작 계획서입니다. 누구를 위해 무엇을, 어디까지 만들지 글로 적은 문서입니다.
 왜 이걸 쓸까요? 만드는 사람과 AI가 같은 문서를 보고 일하기 때문입니다. 적힌 대로 만들고, 다 만들고 나면 적힌 대로 맞는지 확인합니다. 적혀 있지 않은 건 만들지 않습니다.
-(표를 가리키며) 항목은 일곱 개입니다. 칸마다 질문 하나에 답하면 됩니다. 1·2·3·6항은 6-1 메모에 이미 재료가 있습니다. 4항은 오늘 처음 쓰고, 5항 데이터는 7회에 씁니다. 7항은 AI와 함께 쓰면서 무엇을 받아들였는지 적는 칸입니다.
+(표를 가리키며) PRD 항목은 여섯 개입니다. 칸마다 질문 하나에 답하면 됩니다. 1·2·3·6항은 6-1 메모에 이미 재료가 있습니다. (오른쪽 칸을 가리키며) 오른쪽 칸은 이번 시간에 쓰는지입니다. 4항은 오늘 처음 쓰고, 5항 데이터는 다음 주에, 6항은 1·2번만 씁니다. (아래 줄을 가리키며) 7항은 사실 PRD가 아닙니다. 이 수업에서 AI와 어떻게 일했는지, 무엇을 받아들이고 거절했는지 남기는 기록이고 8회 평가에서 봅니다.
 나중에 실제로 서비스를 만들 때도 AI에게 이 PRD를 보여 주며 일합니다.
 [진행 메모]
 3분을 넘기지 않는다. 항목을 하나씩 설명하지 말고 「질문」 칸만 읽어 준다.</a:t>
@@ -1649,7 +1649,7 @@
             <a:r>
               <a:rPr lang="en-US" dirty="0"/>
               <a:t>[20–28분] AI에게 PRD를 읽히고 질문을 받는다
-초안을 고치고 4항까지 썼으면 AI에게 PRD를 읽혀 질문과 제안을 받습니다. 교과서 9쪽 요청문을 복사해 보내세요. 첫 줄에는 상대 경로 복사한 PRD.md를 붙입니다. 8분.
+초안을 고치고 4항까지 썼으면 AI에게 PRD를 읽혀 질문과 제안을 받습니다. 교과서 9쪽 요청문을 복사해 보내세요. 8분.
 AI가 하나씩 묻고, 고치면 좋을 점을 제안합니다. AI가 문서를 직접 고쳐도 괜찮습니다. 문제는 여러분이 그걸 읽느냐 안 읽느냐입니다.
 (왼쪽 카드를 가리키며) AI의 질문, 제안, 고친 곳을 끝까지 읽고 받아들일지 여러분이 정합니다. 이번 학기 내내 들일 습관이 바로 이것입니다. AI가 한 일은 항상 읽고 검토한다.
 (돌아다니며 확인한다)
@@ -4118,27 +4118,7 @@
                 <a:ea typeface="IBM Plex Mono" pitchFamily="34" charset="-122"/>
                 <a:cs typeface="IBM Plex Mono" pitchFamily="34" charset="-120"/>
               </a:rPr>
-              <a:t>PRD.md   ← 상대 경로 복사로 붙인다</a:t>
-            </a:r>
-            <a:endParaRPr lang="en-US" sz="1350" dirty="0"/>
-          </a:p>
-          <a:p>
-            <a:pPr indent="0" marL="0">
-              <a:lnSpc>
-                <a:spcPts val="2295"/>
-              </a:lnSpc>
-              <a:buNone/>
-            </a:pPr>
-            <a:r>
-              <a:rPr lang="en-US" sz="1350" b="1" dirty="0">
-                <a:solidFill>
-                  <a:srgbClr val="E8EAED"/>
-                </a:solidFill>
-                <a:latin typeface="IBM Plex Mono" pitchFamily="34" charset="0"/>
-                <a:ea typeface="IBM Plex Mono" pitchFamily="34" charset="-122"/>
-                <a:cs typeface="IBM Plex Mono" pitchFamily="34" charset="-120"/>
-              </a:rPr>
-              <a:t>이 PRD를 토대로 최소한의 목업을 만들어 줘.</a:t>
+              <a:t>PRD.md를 토대로 최소한의 목업을 만들어 줘.</a:t>
             </a:r>
             <a:endParaRPr lang="en-US" sz="1350" dirty="0"/>
           </a:p>
@@ -7470,7 +7450,7 @@
                 <a:ea typeface="IBM Plex Sans KR" pitchFamily="34" charset="-122"/>
                 <a:cs typeface="IBM Plex Sans KR" pitchFamily="34" charset="-120"/>
               </a:rPr>
-              <a:t>언제</a:t>
+              <a:t>이번 시간에</a:t>
             </a:r>
             <a:endParaRPr lang="en-US" sz="1050" dirty="0"/>
           </a:p>
@@ -7612,7 +7592,7 @@
                 <a:ea typeface="IBM Plex Sans KR" pitchFamily="34" charset="-122"/>
                 <a:cs typeface="IBM Plex Sans KR" pitchFamily="34" charset="-120"/>
               </a:rPr>
-              <a:t>오늘</a:t>
+              <a:t>쓴다</a:t>
             </a:r>
             <a:endParaRPr lang="en-US" sz="1240" dirty="0"/>
           </a:p>
@@ -7754,7 +7734,7 @@
                 <a:ea typeface="IBM Plex Sans KR" pitchFamily="34" charset="-122"/>
                 <a:cs typeface="IBM Plex Sans KR" pitchFamily="34" charset="-120"/>
               </a:rPr>
-              <a:t>오늘</a:t>
+              <a:t>쓴다</a:t>
             </a:r>
             <a:endParaRPr lang="en-US" sz="1240" dirty="0"/>
           </a:p>
@@ -7896,7 +7876,7 @@
                 <a:ea typeface="IBM Plex Sans KR" pitchFamily="34" charset="-122"/>
                 <a:cs typeface="IBM Plex Sans KR" pitchFamily="34" charset="-120"/>
               </a:rPr>
-              <a:t>오늘</a:t>
+              <a:t>쓴다</a:t>
             </a:r>
             <a:endParaRPr lang="en-US" sz="1240" dirty="0"/>
           </a:p>
@@ -8038,7 +8018,7 @@
                 <a:ea typeface="IBM Plex Sans KR" pitchFamily="34" charset="-122"/>
                 <a:cs typeface="IBM Plex Sans KR" pitchFamily="34" charset="-120"/>
               </a:rPr>
-              <a:t>오늘</a:t>
+              <a:t>쓴다</a:t>
             </a:r>
             <a:endParaRPr lang="en-US" sz="1240" dirty="0"/>
           </a:p>
@@ -8180,7 +8160,7 @@
                 <a:ea typeface="IBM Plex Sans KR" pitchFamily="34" charset="-122"/>
                 <a:cs typeface="IBM Plex Sans KR" pitchFamily="34" charset="-120"/>
               </a:rPr>
-              <a:t>7회</a:t>
+              <a:t>다음 주에 쓴다</a:t>
             </a:r>
             <a:endParaRPr lang="en-US" sz="1240" dirty="0"/>
           </a:p>
@@ -8322,7 +8302,7 @@
                 <a:ea typeface="IBM Plex Sans KR" pitchFamily="34" charset="-122"/>
                 <a:cs typeface="IBM Plex Sans KR" pitchFamily="34" charset="-120"/>
               </a:rPr>
-              <a:t>오늘 1·2번</a:t>
+              <a:t>1·2번만 쓴다</a:t>
             </a:r>
             <a:endParaRPr lang="en-US" sz="1240" dirty="0"/>
           </a:p>
@@ -8330,149 +8310,46 @@
       </p:sp>
       <p:sp>
         <p:nvSpPr>
-          <p:cNvPr id="41" name="Shape 39"/>
-          <p:cNvSpPr/>
-          <p:nvPr/>
-        </p:nvSpPr>
-        <p:spPr>
-          <a:xfrm>
-            <a:off x="530352" y="4992624"/>
-            <a:ext cx="11128248" cy="384048"/>
-          </a:xfrm>
-          <a:prstGeom prst="rect">
-            <a:avLst/>
-          </a:prstGeom>
-          <a:solidFill>
-            <a:srgbClr val="F1F2F4"/>
-          </a:solidFill>
-          <a:ln w="9525">
-            <a:solidFill>
-              <a:srgbClr val="E0E3E7"/>
-            </a:solidFill>
-            <a:prstDash val="solid"/>
-          </a:ln>
-        </p:spPr>
+          <p:cNvPr id="41" name="Text 39"/>
+          <p:cNvSpPr/>
+          <p:nvPr/>
+        </p:nvSpPr>
+        <p:spPr>
+          <a:xfrm>
+            <a:off x="530352" y="5029200"/>
+            <a:ext cx="11128248" cy="320040"/>
+          </a:xfrm>
+          <a:prstGeom prst="rect">
+            <a:avLst/>
+          </a:prstGeom>
+          <a:noFill/>
+          <a:ln/>
+        </p:spPr>
+        <p:txBody>
+          <a:bodyPr wrap="square" lIns="0" tIns="0" rIns="0" bIns="0" rtlCol="0" anchor="ctr"/>
+          <a:lstStyle/>
+          <a:p>
+            <a:pPr indent="0" marL="0">
+              <a:buNone/>
+            </a:pPr>
+            <a:r>
+              <a:rPr lang="en-US" sz="1300" b="1" dirty="0">
+                <a:solidFill>
+                  <a:srgbClr val="34373D"/>
+                </a:solidFill>
+                <a:latin typeface="IBM Plex Sans KR" pitchFamily="34" charset="0"/>
+                <a:ea typeface="IBM Plex Sans KR" pitchFamily="34" charset="-122"/>
+                <a:cs typeface="IBM Plex Sans KR" pitchFamily="34" charset="-120"/>
+              </a:rPr>
+              <a:t>＋ 7. AI 사용과 학생의 판단 — PRD가 아니라 이 수업의 기록(8회 평가)</a:t>
+            </a:r>
+            <a:endParaRPr lang="en-US" sz="1300" dirty="0"/>
+          </a:p>
+        </p:txBody>
       </p:sp>
       <p:sp>
         <p:nvSpPr>
           <p:cNvPr id="42" name="Text 40"/>
-          <p:cNvSpPr/>
-          <p:nvPr/>
-        </p:nvSpPr>
-        <p:spPr>
-          <a:xfrm>
-            <a:off x="658368" y="4992624"/>
-            <a:ext cx="3305007" cy="384048"/>
-          </a:xfrm>
-          <a:prstGeom prst="rect">
-            <a:avLst/>
-          </a:prstGeom>
-          <a:noFill/>
-          <a:ln/>
-        </p:spPr>
-        <p:txBody>
-          <a:bodyPr wrap="square" lIns="0" tIns="0" rIns="0" bIns="0" rtlCol="0" anchor="ctr"/>
-          <a:lstStyle/>
-          <a:p>
-            <a:pPr indent="0" marL="0">
-              <a:buNone/>
-            </a:pPr>
-            <a:r>
-              <a:rPr lang="en-US" sz="1240" b="1" dirty="0">
-                <a:solidFill>
-                  <a:srgbClr val="1B1D21"/>
-                </a:solidFill>
-                <a:latin typeface="IBM Plex Sans KR" pitchFamily="34" charset="0"/>
-                <a:ea typeface="IBM Plex Sans KR" pitchFamily="34" charset="-122"/>
-                <a:cs typeface="IBM Plex Sans KR" pitchFamily="34" charset="-120"/>
-              </a:rPr>
-              <a:t>7. AI 사용과 학생의 판단</a:t>
-            </a:r>
-            <a:endParaRPr lang="en-US" sz="1240" dirty="0"/>
-          </a:p>
-        </p:txBody>
-      </p:sp>
-      <p:sp>
-        <p:nvSpPr>
-          <p:cNvPr id="43" name="Text 41"/>
-          <p:cNvSpPr/>
-          <p:nvPr/>
-        </p:nvSpPr>
-        <p:spPr>
-          <a:xfrm>
-            <a:off x="4219407" y="4992624"/>
-            <a:ext cx="5308092" cy="384048"/>
-          </a:xfrm>
-          <a:prstGeom prst="rect">
-            <a:avLst/>
-          </a:prstGeom>
-          <a:noFill/>
-          <a:ln/>
-        </p:spPr>
-        <p:txBody>
-          <a:bodyPr wrap="square" lIns="0" tIns="0" rIns="0" bIns="0" rtlCol="0" anchor="ctr"/>
-          <a:lstStyle/>
-          <a:p>
-            <a:pPr indent="0" marL="0">
-              <a:buNone/>
-            </a:pPr>
-            <a:r>
-              <a:rPr lang="en-US" sz="1240" dirty="0">
-                <a:solidFill>
-                  <a:srgbClr val="6C7078"/>
-                </a:solidFill>
-                <a:latin typeface="IBM Plex Sans KR" pitchFamily="34" charset="0"/>
-                <a:ea typeface="IBM Plex Sans KR" pitchFamily="34" charset="-122"/>
-                <a:cs typeface="IBM Plex Sans KR" pitchFamily="34" charset="-120"/>
-              </a:rPr>
-              <a:t>AI 의견 중 무엇을 받아들였나</a:t>
-            </a:r>
-            <a:endParaRPr lang="en-US" sz="1240" dirty="0"/>
-          </a:p>
-        </p:txBody>
-      </p:sp>
-      <p:sp>
-        <p:nvSpPr>
-          <p:cNvPr id="44" name="Text 42"/>
-          <p:cNvSpPr/>
-          <p:nvPr/>
-        </p:nvSpPr>
-        <p:spPr>
-          <a:xfrm>
-            <a:off x="9783531" y="4992624"/>
-            <a:ext cx="1747053" cy="384048"/>
-          </a:xfrm>
-          <a:prstGeom prst="rect">
-            <a:avLst/>
-          </a:prstGeom>
-          <a:noFill/>
-          <a:ln/>
-        </p:spPr>
-        <p:txBody>
-          <a:bodyPr wrap="square" lIns="0" tIns="0" rIns="0" bIns="0" rtlCol="0" anchor="ctr"/>
-          <a:lstStyle/>
-          <a:p>
-            <a:pPr indent="0" marL="0">
-              <a:buNone/>
-            </a:pPr>
-            <a:r>
-              <a:rPr lang="en-US" sz="1240" dirty="0">
-                <a:solidFill>
-                  <a:srgbClr val="6C7078"/>
-                </a:solidFill>
-                <a:latin typeface="IBM Plex Sans KR" pitchFamily="34" charset="0"/>
-                <a:ea typeface="IBM Plex Sans KR" pitchFamily="34" charset="-122"/>
-                <a:cs typeface="IBM Plex Sans KR" pitchFamily="34" charset="-120"/>
-              </a:rPr>
-              <a:t>오늘</a:t>
-            </a:r>
-            <a:endParaRPr lang="en-US" sz="1240" dirty="0"/>
-          </a:p>
-        </p:txBody>
-      </p:sp>
-      <p:sp>
-        <p:nvSpPr>
-          <p:cNvPr id="45" name="Text 43"/>
           <p:cNvSpPr/>
           <p:nvPr/>
         </p:nvSpPr>
@@ -13423,27 +13300,7 @@
                 <a:ea typeface="IBM Plex Mono" pitchFamily="34" charset="-122"/>
                 <a:cs typeface="IBM Plex Mono" pitchFamily="34" charset="-120"/>
               </a:rPr>
-              <a:t>PRD.md   ← 상대 경로 복사로 붙인다</a:t>
-            </a:r>
-            <a:endParaRPr lang="en-US" sz="1400" dirty="0"/>
-          </a:p>
-          <a:p>
-            <a:pPr indent="0" marL="0">
-              <a:lnSpc>
-                <a:spcPts val="2380"/>
-              </a:lnSpc>
-              <a:buNone/>
-            </a:pPr>
-            <a:r>
-              <a:rPr lang="en-US" sz="1400" b="1" dirty="0">
-                <a:solidFill>
-                  <a:srgbClr val="E8EAED"/>
-                </a:solidFill>
-                <a:latin typeface="IBM Plex Mono" pitchFamily="34" charset="0"/>
-                <a:ea typeface="IBM Plex Mono" pitchFamily="34" charset="-122"/>
-                <a:cs typeface="IBM Plex Mono" pitchFamily="34" charset="-120"/>
-              </a:rPr>
-              <a:t>이 파일을 읽고, 흐릿하거나 서로 맞지 않는 곳을 하나씩 물어봐 줘.</a:t>
+              <a:t>PRD.md를 읽고, 흐릿하거나 서로 맞지 않는 곳을 하나씩 물어봐 줘.</a:t>
             </a:r>
             <a:endParaRPr lang="en-US" sz="1400" dirty="0"/>
           </a:p>

--- a/06/ppt/06-2_서비스_제작_계획서_시작하기_v1.pptx
+++ b/06/ppt/06-2_서비스_제작_계획서_시작하기_v1.pptx
@@ -803,7 +803,14 @@
 화면을 끝까지 보고, PRD와 다른 곳이 있으면 목업이 아니라 PRD의 글부터 고치고 같은 요청을 다시 보냅니다. 목업은 제출물이 아닙니다. 내 글을 확인하는 도구입니다.
 [진행 메모]
 화면이 안 바뀌면 브라우저 탭을 닫고 Open with Live Server로 다시 연다. 교과서 13쪽 「막힐 때」에 있다.
-목업을 예쁘게 꾸미는 요청(색, 그림)으로 새는 학생을 잡는다. 오늘의 중심은 PRD다.</a:t>
+목업을 예쁘게 꾸미는 요청(색, 그림)으로 새는 학생을 잡는다. 오늘의 중심은 PRD다.
+[OpenCode 사용량이 막혔을 때 — 교사용 대안]
+FreeUsageLimitError가 여러 명에게 계속 나오면, 부산시교육청 AI 통합로그인 「펜즈(PENZ)」로 들어가는 생성형 AI(Gemini·Copilot·ChatGPT 등)로 대신한다.
+1) 펜즈로 로그인해 AI를 하나 열고, PRD.md 내용을 통째로 복사해 붙여 넣은 뒤 이렇게 요청한다:
+   「아래 PRD를 토대로 최소한의 목업을 HTML 파일 하나(index.html)로 만들어 줘. 글자 크기·여백·버튼 모양 같은 기초 디자인만 깔끔하게. 내려받을 수 있게 파일로 줘.」
+2) 받은 파일을 06\mockup\index.html로 저장한다(mockup 폴더가 없으면 만든다).
+3) 오른쪽 클릭 → Open with Live Server로 똑같이 본다.
+PRD는 그대로 학생 PC의 PRD.md에 있으므로 수업 흐름은 바뀌지 않는다.</a:t>
             </a:r>
             <a:endParaRPr lang="en-US" dirty="0"/>
           </a:p>
